--- a/gallery/renders/image_focus_basic.pptx
+++ b/gallery/renders/image_focus_basic.pptx
@@ -46,7 +46,9 @@
           <a:bodyPr wrap="square" lIns="0" rIns="0" tIns="0" bIns="0"/>
           <a:lstStyle/>
           <a:p>
-            <a:pPr algn="l"/>
+            <a:pPr algn="l">
+              <a:buNone/>
+            </a:pPr>
             <a:r>
               <a:rPr lang="en-US" sz="2000">
                 <a:latin typeface="Arial"/>
@@ -98,7 +100,9 @@
           <a:bodyPr wrap="square" lIns="0" rIns="0" tIns="0" bIns="0"/>
           <a:lstStyle/>
           <a:p>
-            <a:pPr algn="l"/>
+            <a:pPr algn="l">
+              <a:buNone/>
+            </a:pPr>
             <a:r>
               <a:rPr lang="en-US" sz="3200" b="1">
                 <a:latin typeface="Arial"/>

--- a/gallery/renders/image_focus_basic.pptx
+++ b/gallery/renders/image_focus_basic.pptx
@@ -35,7 +35,7 @@
         <p:spPr>
           <a:xfrm>
             <a:off x="689254" y="6188659"/>
-            <a:ext cx="11613286" cy="760780"/>
+            <a:ext cx="11613286" cy="304799"/>
           </a:xfrm>
           <a:prstGeom prst="rect">
             <a:avLst/>
@@ -89,7 +89,7 @@
         <p:spPr>
           <a:xfrm>
             <a:off x="689254" y="460857"/>
-            <a:ext cx="11613286" cy="855878"/>
+            <a:ext cx="11613286" cy="487680"/>
           </a:xfrm>
           <a:prstGeom prst="rect">
             <a:avLst/>
